--- a/week-03/presentations/ppts/day-01-drafting-technical-prds.pptx
+++ b/week-03/presentations/ppts/day-01-drafting-technical-prds.pptx
@@ -5671,11 +5671,11 @@
             </a:r>
           </a:p>
           <a:p>
-            <a:pPr lvl="0" indent="0" marL="1270000">
-              <a:buNone/>
-            </a:pPr>
-            <a:r>
-              <a:rPr sz="2000"/>
+            <a:pPr lvl="0" indent="0" marL="0">
+              <a:buNone/>
+            </a:pPr>
+            <a:r>
+              <a:rPr/>
               <a:t>Tie-breaker: if two features tie, the triad must argue, not split the difference. The discipline of choosing is the work.</a:t>
             </a:r>
           </a:p>

--- a/week-03/presentations/ppts/day-01-drafting-technical-prds.pptx
+++ b/week-03/presentations/ppts/day-01-drafting-technical-prds.pptx
@@ -6096,7 +6096,7 @@
             </a:pPr>
             <a:r>
               <a:rPr/>
-              <a:t>The user’s job-to-be-done, the friction they hit today, why workarounds are inadequate.</a:t>
+              <a:t>The job-to-be-done, today’s friction, why workarounds fall short.</a:t>
             </a:r>
           </a:p>
           <a:p>
@@ -6141,7 +6141,7 @@
             </a:pPr>
             <a:r>
               <a:rPr/>
-              <a:t>“Dispatchers spend ~45 min after-shift cross-checking 3 systems (paper tickets, truck stock, timecards). Maria (Interview 2) said: ‘I usually just guess on the last 4 entries by 6:30 because I want to get home.’”</a:t>
+              <a:t>“Dispatchers spend ~45 min after-shift cross-checking 3 systems. Maria (Interview A3): ‘I just guess on the last 4 entries by 6:30 — I want to get home.’”</a:t>
             </a:r>
           </a:p>
         </p:txBody>

--- a/week-03/presentations/ppts/day-01-drafting-technical-prds.pptx
+++ b/week-03/presentations/ppts/day-01-drafting-technical-prds.pptx
@@ -631,7 +631,7 @@
             </a:pPr>
             <a:r>
               <a:rPr/>
-              <a:t>Open Block 2 by reminding triads §1 and §2 are where engineers decide whether to keep reading. The Week-1 interviews and Week-2 journey map are the raw material — not generic framing.</a:t>
+              <a:t>Open Block 2 by reminding triads Section 1 and Section 2 are where engineers decide whether to keep reading. The Week-1 interviews and Week-2 journey map are the raw material — not generic framing.</a:t>
             </a:r>
           </a:p>
         </p:txBody>
@@ -1369,7 +1369,7 @@
             </a:pPr>
             <a:r>
               <a:rPr/>
-              <a:t>The §5 sketch is where over-specification creeps in. Coach triads to leave room for engineering judgment — flow, surfaces, and interactions, not schema or class names.</a:t>
+              <a:t>The Section 5 sketch is where over-specification creeps in. Coach triads to leave room for engineering judgment — flow, surfaces, and interactions, not schema or class names.</a:t>
             </a:r>
           </a:p>
         </p:txBody>
@@ -1943,7 +1943,7 @@
             </a:pPr>
             <a:r>
               <a:rPr/>
-              <a:t>By 16:00, every triad has §§1–5 drafted. Day 2 adds AC; Day 3 adds NFRs; Day 4 assembles; Day 5 reviews.</a:t>
+              <a:t>By 16:00, every triad has Sections 1–5 drafted. Day 2 adds AC; Day 3 adds NFRs; Day 4 assembles; Day 5 reviews.</a:t>
             </a:r>
           </a:p>
         </p:txBody>
@@ -2435,7 +2435,7 @@
             </a:pPr>
             <a:r>
               <a:rPr/>
-              <a:t>Memo seeds §1. Triads who skip the memo write generic context sections later.</a:t>
+              <a:t>Memo seeds Section 1. Triads who skip the memo write generic context sections later.</a:t>
             </a:r>
           </a:p>
         </p:txBody>
@@ -6024,7 +6024,7 @@
             </a:pPr>
             <a:r>
               <a:rPr/>
-              <a:t>The test: after reading §1, the engineer should be willing to keep reading §2.</a:t>
+              <a:t>The test: after reading Section 1, the engineer should be willing to keep reading Section 2.</a:t>
             </a:r>
           </a:p>
         </p:txBody>
@@ -6188,7 +6188,7 @@
             </a:pPr>
             <a:r>
               <a:rPr/>
-              <a:t>👥 Activity 2 — §1 + §2</a:t>
+              <a:t>👥 Activity 2 — Section 1 + Section 2</a:t>
             </a:r>
           </a:p>
         </p:txBody>
@@ -6225,16 +6225,16 @@
             </a:pPr>
             <a:r>
               <a:rPr/>
-              <a:t>Each member drafts §1 alone, then triad picks the strongest. Repeat for §2. Quote a real customer at least once.</a:t>
-            </a:r>
-          </a:p>
-          <a:p>
-            <a:pPr lvl="0" indent="0" marL="0">
-              <a:buNone/>
-            </a:pPr>
-            <a:r>
-              <a:rPr/>
-              <a:t>10 min: solo §1 drafts</a:t>
+              <a:t>Each member drafts Section 1 alone, then triad picks the strongest. Repeat for Section 2. Quote a real customer at least once.</a:t>
+            </a:r>
+          </a:p>
+          <a:p>
+            <a:pPr lvl="0" indent="0" marL="0">
+              <a:buNone/>
+            </a:pPr>
+            <a:r>
+              <a:rPr/>
+              <a:t>10 min: solo Section 1 drafts</a:t>
             </a:r>
           </a:p>
           <a:p>
@@ -6252,7 +6252,7 @@
             </a:pPr>
             <a:r>
               <a:rPr/>
-              <a:t>10 min: solo §2 drafts</a:t>
+              <a:t>10 min: solo Section 2 drafts</a:t>
             </a:r>
           </a:p>
           <a:p>
@@ -6872,7 +6872,7 @@
             </a:pPr>
             <a:r>
               <a:rPr/>
-              <a:t>👥 Activity 3 — §3 + §4</a:t>
+              <a:t>👥 Activity 3 — Section 3 + Section 4</a:t>
             </a:r>
           </a:p>
         </p:txBody>
@@ -7076,7 +7076,7 @@
             </a:pPr>
             <a:r>
               <a:rPr/>
-              <a:t>✏️ What Goes In §5</a:t>
+              <a:t>✏️ What Goes In Section 5</a:t>
             </a:r>
           </a:p>
         </p:txBody>
@@ -7263,7 +7263,7 @@
             </a:pPr>
             <a:r>
               <a:rPr/>
-              <a:t>After writing §5, ask: what are the first three questions an engineer would ask after reading this?</a:t>
+              <a:t>After writing Section 5, ask: what are the first three questions an engineer would ask after reading this?</a:t>
             </a:r>
           </a:p>
           <a:p>
@@ -7382,7 +7382,7 @@
             </a:pPr>
             <a:r>
               <a:rPr/>
-              <a:t>👥 Activity 4 — §5 Solution Sketch</a:t>
+              <a:t>👥 Activity 4 — Section 5 Solution Sketch</a:t>
             </a:r>
           </a:p>
         </p:txBody>
@@ -7554,43 +7554,43 @@
             </a:pPr>
             <a:r>
               <a:rPr/>
-              <a:t>§1 Context (engineer-readable)</a:t>
-            </a:r>
-          </a:p>
-          <a:p>
-            <a:pPr lvl="0" indent="0" marL="0">
-              <a:buNone/>
-            </a:pPr>
-            <a:r>
-              <a:rPr/>
-              <a:t>§2 Problem (with customer quote)</a:t>
-            </a:r>
-          </a:p>
-          <a:p>
-            <a:pPr lvl="0" indent="0" marL="0">
-              <a:buNone/>
-            </a:pPr>
-            <a:r>
-              <a:rPr/>
-              <a:t>§3 Goals + non-goals (user outcomes)</a:t>
-            </a:r>
-          </a:p>
-          <a:p>
-            <a:pPr lvl="0" indent="0" marL="0">
-              <a:buNone/>
-            </a:pPr>
-            <a:r>
-              <a:rPr/>
-              <a:t>§4 Scope (in/out table)</a:t>
-            </a:r>
-          </a:p>
-          <a:p>
-            <a:pPr lvl="0" indent="0" marL="0">
-              <a:buNone/>
-            </a:pPr>
-            <a:r>
-              <a:rPr/>
-              <a:t>§5 Solution sketch (no over-spec)</a:t>
+              <a:t>Section 1 Context</a:t>
+            </a:r>
+          </a:p>
+          <a:p>
+            <a:pPr lvl="0" indent="0" marL="0">
+              <a:buNone/>
+            </a:pPr>
+            <a:r>
+              <a:rPr/>
+              <a:t>Section 2 Problem</a:t>
+            </a:r>
+          </a:p>
+          <a:p>
+            <a:pPr lvl="0" indent="0" marL="0">
+              <a:buNone/>
+            </a:pPr>
+            <a:r>
+              <a:rPr/>
+              <a:t>Section 3 Goals + non-goals</a:t>
+            </a:r>
+          </a:p>
+          <a:p>
+            <a:pPr lvl="0" indent="0" marL="0">
+              <a:buNone/>
+            </a:pPr>
+            <a:r>
+              <a:rPr/>
+              <a:t>Section 4 Scope</a:t>
+            </a:r>
+          </a:p>
+          <a:p>
+            <a:pPr lvl="0" indent="0" marL="0">
+              <a:buNone/>
+            </a:pPr>
+            <a:r>
+              <a:rPr/>
+              <a:t>Section 5 Solution sketch</a:t>
             </a:r>
           </a:p>
           <a:p>
@@ -7644,7 +7644,7 @@
             </a:pPr>
             <a:r>
               <a:rPr/>
-              <a:t>Bring to Day 2: Your draft §§1–5. AC will be written against them.</a:t>
+              <a:t>Bring to Day 2: Your draft Sections 1–5. AC will be written against them.</a:t>
             </a:r>
           </a:p>
         </p:txBody>
@@ -7719,7 +7719,7 @@
             </a:pPr>
             <a:r>
               <a:rPr b="1"/>
-              <a:t>If an engineer read your §5 right now, what would their first question be?</a:t>
+              <a:t>If an engineer read your Section 5 right now, what would their first question be?</a:t>
             </a:r>
           </a:p>
         </p:txBody>
@@ -8353,7 +8353,7 @@
             </a:pPr>
             <a:r>
               <a:rPr/>
-              <a:t>Engineer-readable from §1</a:t>
+              <a:t>Engineer-readable from Section 1</a:t>
             </a:r>
           </a:p>
           <a:p>

--- a/week-03/presentations/ppts/day-01-drafting-technical-prds.pptx
+++ b/week-03/presentations/ppts/day-01-drafting-technical-prds.pptx
@@ -7173,7 +7173,7 @@
             </a:pPr>
             <a:r>
               <a:rPr/>
-              <a:t>Specific API contracts</a:t>
+              <a:t>Specific application programming interface (API) contracts</a:t>
             </a:r>
           </a:p>
           <a:p>
@@ -7626,7 +7626,7 @@
             </a:pPr>
             <a:r>
               <a:rPr/>
-              <a:t>The 5 AC failure modes</a:t>
+              <a:t>The 5 acceptance criteria (AC) failure modes</a:t>
             </a:r>
           </a:p>
           <a:p>
@@ -8434,7 +8434,7 @@
             </a:pPr>
             <a:r>
               <a:rPr/>
-              <a:t>The TPM contract: a PRD an engineering lead would accept as scoping input without a clarifying call.</a:t>
+              <a:t>The TPM contract: a Product Requirements Document (PRD) an engineering lead would accept as scoping input without a clarifying call.</a:t>
             </a:r>
           </a:p>
         </p:txBody>
@@ -8578,7 +8578,7 @@
             </a:pPr>
             <a:r>
               <a:rPr/>
-              <a:t>Non-Functional Reqs (Day 3)</a:t>
+              <a:t>Non-Functional Requirements (NFR) (Day 3)</a:t>
             </a:r>
           </a:p>
           <a:p>

--- a/week-03/presentations/ppts/day-01-drafting-technical-prds.pptx
+++ b/week-03/presentations/ppts/day-01-drafting-technical-prds.pptx
@@ -549,7 +549,7 @@
             </a:pPr>
             <a:r>
               <a:rPr/>
-              <a:t>Week 3 is the first capstone. Triads convert their Week-2 strategy package into a Technical PRD that ships Friday after structured peer review. AI is OFF this week.</a:t>
+              <a:t>Week 3 is the first capstone. Quads convert their Week-2 strategy package into a Technical PRD that ships Friday after structured peer review. AI is OFF this week.</a:t>
             </a:r>
           </a:p>
         </p:txBody>
@@ -631,7 +631,7 @@
             </a:pPr>
             <a:r>
               <a:rPr/>
-              <a:t>Open Block 2 by reminding triads Section 1 and Section 2 are where engineers decide whether to keep reading. The Week-1 interviews and Week-2 journey map are the raw material — not generic framing.</a:t>
+              <a:t>Open Block 2 by reminding quads Section 1 and Section 2 are where engineers decide whether to keep reading. The Week-1 interviews and Week-2 journey map are the raw material — not generic framing.</a:t>
             </a:r>
           </a:p>
         </p:txBody>
@@ -877,7 +877,7 @@
             </a:pPr>
             <a:r>
               <a:rPr/>
-              <a:t>Solo drafting first. Then combine. Going straight to triad-write produces lowest-common-denominator prose.</a:t>
+              <a:t>Solo drafting first. Then combine. Going straight to quad-write produces lowest-common-denominator prose.</a:t>
             </a:r>
           </a:p>
         </p:txBody>
@@ -959,7 +959,7 @@
             </a:pPr>
             <a:r>
               <a:rPr/>
-              <a:t>Block 3 is where triads bound the work. Goals must be outcomes, non-goals pre-empt scope creep, and the in/out scope table becomes the negotiation tool for Week 6.</a:t>
+              <a:t>Block 3 is where quads bound the work. Goals must be outcomes, non-goals pre-empt scope creep, and the in/out scope table becomes the negotiation tool for Week 6.</a:t>
             </a:r>
           </a:p>
         </p:txBody>
@@ -1123,7 +1123,7 @@
             </a:pPr>
             <a:r>
               <a:rPr/>
-              <a:t>Triads who skip non-goals lose Week 6 stakeholder negotiations. Plant the discipline now.</a:t>
+              <a:t>Quads who skip non-goals lose Week 6 stakeholder negotiations. Plant the discipline now.</a:t>
             </a:r>
           </a:p>
         </p:txBody>
@@ -1369,7 +1369,7 @@
             </a:pPr>
             <a:r>
               <a:rPr/>
-              <a:t>The Section 5 sketch is where over-specification creeps in. Coach triads to leave room for engineering judgment — flow, surfaces, and interactions, not schema or class names.</a:t>
+              <a:t>The Section 5 sketch is where over-specification creeps in. Coach quads to leave room for engineering judgment — flow, surfaces, and interactions, not schema or class names.</a:t>
             </a:r>
           </a:p>
         </p:txBody>
@@ -1615,7 +1615,7 @@
             </a:pPr>
             <a:r>
               <a:rPr/>
-              <a:t>This test is repeatable and high-leverage. Have triads run it on each other’s drafts.</a:t>
+              <a:t>This test is repeatable and high-leverage. Have quads run it on each other’s drafts.</a:t>
             </a:r>
           </a:p>
         </p:txBody>
@@ -1697,7 +1697,7 @@
             </a:pPr>
             <a:r>
               <a:rPr/>
-              <a:t>Wrap-share: each triad shares feature name + 1 sentence each of context, problem, top goal, top non-goal. Catches generic features early.</a:t>
+              <a:t>Wrap-share: each quad shares feature name + 1 sentence each of context, problem, top goal, top non-goal. Catches generic features early.</a:t>
             </a:r>
           </a:p>
         </p:txBody>
@@ -1943,7 +1943,7 @@
             </a:pPr>
             <a:r>
               <a:rPr/>
-              <a:t>By 16:00, every triad has Sections 1–5 drafted. Day 2 adds AC; Day 3 adds NFRs; Day 4 assembles; Day 5 reviews.</a:t>
+              <a:t>By 16:00, every quad has Sections 1–5 drafted. Day 2 adds AC; Day 3 adds NFRs; Day 4 assembles; Day 5 reviews.</a:t>
             </a:r>
           </a:p>
         </p:txBody>
@@ -2271,7 +2271,7 @@
             </a:pPr>
             <a:r>
               <a:rPr/>
-              <a:t>Print the full template, one per triad. They write directly on the printed template — discourages copy-paste.</a:t>
+              <a:t>Print the full template, one per quad. They write directly on the printed template — discourages copy-paste.</a:t>
             </a:r>
           </a:p>
         </p:txBody>
@@ -2353,7 +2353,7 @@
             </a:pPr>
             <a:r>
               <a:rPr/>
-              <a:t>If a triad starts to merge two features into one, push back. They’re trying to avoid the choice.</a:t>
+              <a:t>If a quad starts to merge two features into one, push back. They’re trying to avoid the choice.</a:t>
             </a:r>
           </a:p>
         </p:txBody>
@@ -2435,7 +2435,7 @@
             </a:pPr>
             <a:r>
               <a:rPr/>
-              <a:t>Memo seeds Section 1. Triads who skip the memo write generic context sections later.</a:t>
+              <a:t>Memo seeds Section 1. Quads who skip the memo write generic context sections later.</a:t>
             </a:r>
           </a:p>
         </p:txBody>
@@ -5676,7 +5676,7 @@
             </a:pPr>
             <a:r>
               <a:rPr/>
-              <a:t>Tie-breaker: if two features tie, the triad must argue, not split the difference. The discipline of choosing is the work.</a:t>
+              <a:t>Tie-breaker: if two features tie, the quad must argue, not split the difference. The discipline of choosing is the work.</a:t>
             </a:r>
           </a:p>
         </p:txBody>
@@ -5751,7 +5751,7 @@
             </a:pPr>
             <a:r>
               <a:rPr b="1"/>
-              <a:t>Triads • 35 minutes</a:t>
+              <a:t>Quads • 35 minutes</a:t>
             </a:r>
           </a:p>
           <a:p>
@@ -6216,16 +6216,16 @@
             </a:pPr>
             <a:r>
               <a:rPr b="1"/>
-              <a:t>Triads • 40 minutes</a:t>
-            </a:r>
-          </a:p>
-          <a:p>
-            <a:pPr lvl="0" indent="0" marL="0">
-              <a:buNone/>
-            </a:pPr>
-            <a:r>
-              <a:rPr/>
-              <a:t>Each member drafts Section 1 alone, then triad picks the strongest. Repeat for Section 2. Quote a real customer at least once.</a:t>
+              <a:t>Quads • 40 minutes</a:t>
+            </a:r>
+          </a:p>
+          <a:p>
+            <a:pPr lvl="0" indent="0" marL="0">
+              <a:buNone/>
+            </a:pPr>
+            <a:r>
+              <a:rPr/>
+              <a:t>Each member drafts Section 1 alone, then quad picks the strongest. Repeat for Section 2. Quote a real customer at least once.</a:t>
             </a:r>
           </a:p>
           <a:p>
@@ -6900,7 +6900,7 @@
             </a:pPr>
             <a:r>
               <a:rPr b="1"/>
-              <a:t>Triads • 40 minutes</a:t>
+              <a:t>Quads • 40 minutes</a:t>
             </a:r>
           </a:p>
           <a:p>
@@ -7410,7 +7410,7 @@
             </a:pPr>
             <a:r>
               <a:rPr b="1"/>
-              <a:t>Triads • 45 minutes + Wrap</a:t>
+              <a:t>Quads • 45 minutes + Wrap</a:t>
             </a:r>
           </a:p>
           <a:p>

--- a/week-03/presentations/ppts/day-01-drafting-technical-prds.pptx
+++ b/week-03/presentations/ppts/day-01-drafting-technical-prds.pptx
@@ -5751,7 +5751,7 @@
             </a:pPr>
             <a:r>
               <a:rPr b="1"/>
-              <a:t>Quads • 35 minutes</a:t>
+              <a:t>Quads • 45 minutes</a:t>
             </a:r>
           </a:p>
           <a:p>
@@ -6216,7 +6216,7 @@
             </a:pPr>
             <a:r>
               <a:rPr b="1"/>
-              <a:t>Quads • 40 minutes</a:t>
+              <a:t>Quads • 50 minutes</a:t>
             </a:r>
           </a:p>
           <a:p>
@@ -6900,7 +6900,7 @@
             </a:pPr>
             <a:r>
               <a:rPr b="1"/>
-              <a:t>Quads • 40 minutes</a:t>
+              <a:t>Quads • 50 minutes</a:t>
             </a:r>
           </a:p>
           <a:p>
@@ -7410,7 +7410,7 @@
             </a:pPr>
             <a:r>
               <a:rPr b="1"/>
-              <a:t>Quads • 45 minutes + Wrap</a:t>
+              <a:t>Quads • 55 minutes + Wrap</a:t>
             </a:r>
           </a:p>
           <a:p>

--- a/week-03/presentations/ppts/day-01-drafting-technical-prds.pptx
+++ b/week-03/presentations/ppts/day-01-drafting-technical-prds.pptx
@@ -5778,7 +5778,7 @@
             </a:pPr>
             <a:r>
               <a:rPr/>
-              <a:t>10 min: score each on 4 dimensions</a:t>
+              <a:t>20 min: score each on 4 dimensions</a:t>
             </a:r>
           </a:p>
           <a:p>
@@ -6234,7 +6234,7 @@
             </a:pPr>
             <a:r>
               <a:rPr/>
-              <a:t>10 min: solo Section 1 drafts</a:t>
+              <a:t>20 min: solo Section 1 drafts</a:t>
             </a:r>
           </a:p>
           <a:p>
@@ -6270,7 +6270,7 @@
             </a:pPr>
             <a:r>
               <a:rPr/>
-              <a:t>⏱ 10 + 10 + 10 + 10</a:t>
+              <a:t>⏱ 20 + 10 + 10 + 10</a:t>
             </a:r>
           </a:p>
         </p:txBody>
@@ -6936,7 +6936,7 @@
             </a:pPr>
             <a:r>
               <a:rPr/>
-              <a:t>15 min: scope table</a:t>
+              <a:t>25 min: scope table</a:t>
             </a:r>
           </a:p>
           <a:p>
@@ -6954,7 +6954,7 @@
             </a:pPr>
             <a:r>
               <a:rPr/>
-              <a:t>⏱ 10 + 10 + 15 + 5</a:t>
+              <a:t>⏱ 10 + 10 + 25 + 5</a:t>
             </a:r>
           </a:p>
         </p:txBody>
@@ -7428,7 +7428,7 @@
             </a:pPr>
             <a:r>
               <a:rPr/>
-              <a:t>15 min: sketch flow (4–8 steps)</a:t>
+              <a:t>25 min: sketch flow (4–8 steps)</a:t>
             </a:r>
           </a:p>
           <a:p>
@@ -7464,7 +7464,7 @@
             </a:pPr>
             <a:r>
               <a:rPr/>
-              <a:t>⏱ 15 + 10 + 10 + 10 · 15-min wrap-share</a:t>
+              <a:t>⏱ 25 + 10 + 10 + 10 · 15-min wrap-share</a:t>
             </a:r>
           </a:p>
         </p:txBody>
